--- a/packages/pptx_reader/test/fixtures/real/deck_4x3_theme.pptx
+++ b/packages/pptx_reader/test/fixtures/real/deck_4x3_theme.pptx
@@ -828,7 +828,7 @@
           <a:bodyPr/>
           <a:lstStyle/>
           <a:p>
-            <a:fld id="{73FD1AE6-FD9D-46B2-AD34-6D7FD1390061}" type="datetimeFigureOut">
+            <a:fld id="{05A334F3-B55F-42B0-A9C7-3752F0662735}" type="datetimeFigureOut">
               <a:rPr lang="en-US" smtClean="0"/>
               <a:t>10/26/2026</a:t>
             </a:fld>
@@ -870,7 +870,7 @@
           <a:bodyPr/>
           <a:lstStyle/>
           <a:p>
-            <a:fld id="{49CFD036-43A2-409F-AA03-9AEAD967771D}" type="slidenum">
+            <a:fld id="{828C42ED-CC03-4982-88EC-4076BCEB1E28}" type="slidenum">
               <a:rPr lang="en-US" smtClean="0"/>
               <a:t>‹#›</a:t>
             </a:fld>
@@ -881,7 +881,7 @@
     </p:spTree>
     <p:extLst>
       <p:ext uri="{BB962C8B-B14F-4D97-AF65-F5344CB8AC3E}">
-        <p14:creationId xmlns:p14="http://schemas.microsoft.com/office/powerpoint/2010/main" val="4016381650"/>
+        <p14:creationId xmlns:p14="http://schemas.microsoft.com/office/powerpoint/2010/main" val="1119297483"/>
       </p:ext>
     </p:extLst>
   </p:cSld>
@@ -1079,7 +1079,7 @@
           <a:bodyPr/>
           <a:lstStyle/>
           <a:p>
-            <a:fld id="{73FD1AE6-FD9D-46B2-AD34-6D7FD1390061}" type="datetimeFigureOut">
+            <a:fld id="{05A334F3-B55F-42B0-A9C7-3752F0662735}" type="datetimeFigureOut">
               <a:rPr lang="en-US" smtClean="0"/>
               <a:t>10/26/2026</a:t>
             </a:fld>
@@ -1121,7 +1121,7 @@
           <a:bodyPr/>
           <a:lstStyle/>
           <a:p>
-            <a:fld id="{49CFD036-43A2-409F-AA03-9AEAD967771D}" type="slidenum">
+            <a:fld id="{828C42ED-CC03-4982-88EC-4076BCEB1E28}" type="slidenum">
               <a:rPr lang="en-US" smtClean="0"/>
               <a:t>‹#›</a:t>
             </a:fld>
@@ -1132,7 +1132,7 @@
     </p:spTree>
     <p:extLst>
       <p:ext uri="{BB962C8B-B14F-4D97-AF65-F5344CB8AC3E}">
-        <p14:creationId xmlns:p14="http://schemas.microsoft.com/office/powerpoint/2010/main" val="3821393621"/>
+        <p14:creationId xmlns:p14="http://schemas.microsoft.com/office/powerpoint/2010/main" val="1456615697"/>
       </p:ext>
     </p:extLst>
   </p:cSld>
@@ -1393,7 +1393,7 @@
           <a:bodyPr/>
           <a:lstStyle/>
           <a:p>
-            <a:fld id="{73FD1AE6-FD9D-46B2-AD34-6D7FD1390061}" type="datetimeFigureOut">
+            <a:fld id="{05A334F3-B55F-42B0-A9C7-3752F0662735}" type="datetimeFigureOut">
               <a:rPr lang="en-US" smtClean="0"/>
               <a:t>10/26/2026</a:t>
             </a:fld>
@@ -1435,7 +1435,7 @@
           <a:bodyPr/>
           <a:lstStyle/>
           <a:p>
-            <a:fld id="{49CFD036-43A2-409F-AA03-9AEAD967771D}" type="slidenum">
+            <a:fld id="{828C42ED-CC03-4982-88EC-4076BCEB1E28}" type="slidenum">
               <a:rPr lang="en-US" smtClean="0"/>
               <a:t>‹#›</a:t>
             </a:fld>
@@ -1536,7 +1536,7 @@
     </p:spTree>
     <p:extLst>
       <p:ext uri="{BB962C8B-B14F-4D97-AF65-F5344CB8AC3E}">
-        <p14:creationId xmlns:p14="http://schemas.microsoft.com/office/powerpoint/2010/main" val="1888975008"/>
+        <p14:creationId xmlns:p14="http://schemas.microsoft.com/office/powerpoint/2010/main" val="1677393700"/>
       </p:ext>
     </p:extLst>
   </p:cSld>
@@ -1734,7 +1734,7 @@
           <a:bodyPr/>
           <a:lstStyle/>
           <a:p>
-            <a:fld id="{73FD1AE6-FD9D-46B2-AD34-6D7FD1390061}" type="datetimeFigureOut">
+            <a:fld id="{05A334F3-B55F-42B0-A9C7-3752F0662735}" type="datetimeFigureOut">
               <a:rPr lang="en-US" smtClean="0"/>
               <a:t>10/26/2026</a:t>
             </a:fld>
@@ -1776,7 +1776,7 @@
           <a:bodyPr/>
           <a:lstStyle/>
           <a:p>
-            <a:fld id="{49CFD036-43A2-409F-AA03-9AEAD967771D}" type="slidenum">
+            <a:fld id="{828C42ED-CC03-4982-88EC-4076BCEB1E28}" type="slidenum">
               <a:rPr lang="en-US" smtClean="0"/>
               <a:t>‹#›</a:t>
             </a:fld>
@@ -1787,7 +1787,7 @@
     </p:spTree>
     <p:extLst>
       <p:ext uri="{BB962C8B-B14F-4D97-AF65-F5344CB8AC3E}">
-        <p14:creationId xmlns:p14="http://schemas.microsoft.com/office/powerpoint/2010/main" val="2832285362"/>
+        <p14:creationId xmlns:p14="http://schemas.microsoft.com/office/powerpoint/2010/main" val="900142458"/>
       </p:ext>
     </p:extLst>
   </p:cSld>
@@ -2048,7 +2048,7 @@
           <a:bodyPr/>
           <a:lstStyle/>
           <a:p>
-            <a:fld id="{73FD1AE6-FD9D-46B2-AD34-6D7FD1390061}" type="datetimeFigureOut">
+            <a:fld id="{05A334F3-B55F-42B0-A9C7-3752F0662735}" type="datetimeFigureOut">
               <a:rPr lang="en-US" smtClean="0"/>
               <a:t>10/26/2026</a:t>
             </a:fld>
@@ -2090,7 +2090,7 @@
           <a:bodyPr/>
           <a:lstStyle/>
           <a:p>
-            <a:fld id="{49CFD036-43A2-409F-AA03-9AEAD967771D}" type="slidenum">
+            <a:fld id="{828C42ED-CC03-4982-88EC-4076BCEB1E28}" type="slidenum">
               <a:rPr lang="en-US" smtClean="0"/>
               <a:t>‹#›</a:t>
             </a:fld>
@@ -2183,7 +2183,7 @@
     </p:spTree>
     <p:extLst>
       <p:ext uri="{BB962C8B-B14F-4D97-AF65-F5344CB8AC3E}">
-        <p14:creationId xmlns:p14="http://schemas.microsoft.com/office/powerpoint/2010/main" val="3213804241"/>
+        <p14:creationId xmlns:p14="http://schemas.microsoft.com/office/powerpoint/2010/main" val="1499703049"/>
       </p:ext>
     </p:extLst>
   </p:cSld>
@@ -2441,7 +2441,7 @@
           <a:bodyPr/>
           <a:lstStyle/>
           <a:p>
-            <a:fld id="{73FD1AE6-FD9D-46B2-AD34-6D7FD1390061}" type="datetimeFigureOut">
+            <a:fld id="{05A334F3-B55F-42B0-A9C7-3752F0662735}" type="datetimeFigureOut">
               <a:rPr lang="en-US" smtClean="0"/>
               <a:t>10/26/2026</a:t>
             </a:fld>
@@ -2483,7 +2483,7 @@
           <a:bodyPr/>
           <a:lstStyle/>
           <a:p>
-            <a:fld id="{49CFD036-43A2-409F-AA03-9AEAD967771D}" type="slidenum">
+            <a:fld id="{828C42ED-CC03-4982-88EC-4076BCEB1E28}" type="slidenum">
               <a:rPr lang="en-US" smtClean="0"/>
               <a:t>‹#›</a:t>
             </a:fld>
@@ -2494,7 +2494,7 @@
     </p:spTree>
     <p:extLst>
       <p:ext uri="{BB962C8B-B14F-4D97-AF65-F5344CB8AC3E}">
-        <p14:creationId xmlns:p14="http://schemas.microsoft.com/office/powerpoint/2010/main" val="536929016"/>
+        <p14:creationId xmlns:p14="http://schemas.microsoft.com/office/powerpoint/2010/main" val="3971784864"/>
       </p:ext>
     </p:extLst>
   </p:cSld>
@@ -2611,7 +2611,7 @@
           <a:bodyPr/>
           <a:lstStyle/>
           <a:p>
-            <a:fld id="{73FD1AE6-FD9D-46B2-AD34-6D7FD1390061}" type="datetimeFigureOut">
+            <a:fld id="{05A334F3-B55F-42B0-A9C7-3752F0662735}" type="datetimeFigureOut">
               <a:rPr lang="en-US" smtClean="0"/>
               <a:t>10/26/2026</a:t>
             </a:fld>
@@ -2653,7 +2653,7 @@
           <a:bodyPr/>
           <a:lstStyle/>
           <a:p>
-            <a:fld id="{49CFD036-43A2-409F-AA03-9AEAD967771D}" type="slidenum">
+            <a:fld id="{828C42ED-CC03-4982-88EC-4076BCEB1E28}" type="slidenum">
               <a:rPr lang="en-US" smtClean="0"/>
               <a:t>‹#›</a:t>
             </a:fld>
@@ -2664,7 +2664,7 @@
     </p:spTree>
     <p:extLst>
       <p:ext uri="{BB962C8B-B14F-4D97-AF65-F5344CB8AC3E}">
-        <p14:creationId xmlns:p14="http://schemas.microsoft.com/office/powerpoint/2010/main" val="4130690876"/>
+        <p14:creationId xmlns:p14="http://schemas.microsoft.com/office/powerpoint/2010/main" val="227488039"/>
       </p:ext>
     </p:extLst>
   </p:cSld>
@@ -2791,7 +2791,7 @@
           <a:bodyPr/>
           <a:lstStyle/>
           <a:p>
-            <a:fld id="{73FD1AE6-FD9D-46B2-AD34-6D7FD1390061}" type="datetimeFigureOut">
+            <a:fld id="{05A334F3-B55F-42B0-A9C7-3752F0662735}" type="datetimeFigureOut">
               <a:rPr lang="en-US" smtClean="0"/>
               <a:t>10/26/2026</a:t>
             </a:fld>
@@ -2833,7 +2833,7 @@
           <a:bodyPr/>
           <a:lstStyle/>
           <a:p>
-            <a:fld id="{49CFD036-43A2-409F-AA03-9AEAD967771D}" type="slidenum">
+            <a:fld id="{828C42ED-CC03-4982-88EC-4076BCEB1E28}" type="slidenum">
               <a:rPr lang="en-US" smtClean="0"/>
               <a:t>‹#›</a:t>
             </a:fld>
@@ -2844,7 +2844,7 @@
     </p:spTree>
     <p:extLst>
       <p:ext uri="{BB962C8B-B14F-4D97-AF65-F5344CB8AC3E}">
-        <p14:creationId xmlns:p14="http://schemas.microsoft.com/office/powerpoint/2010/main" val="3237342070"/>
+        <p14:creationId xmlns:p14="http://schemas.microsoft.com/office/powerpoint/2010/main" val="727374827"/>
       </p:ext>
     </p:extLst>
   </p:cSld>
@@ -2967,7 +2967,7 @@
           <a:bodyPr/>
           <a:lstStyle/>
           <a:p>
-            <a:fld id="{73FD1AE6-FD9D-46B2-AD34-6D7FD1390061}" type="datetimeFigureOut">
+            <a:fld id="{05A334F3-B55F-42B0-A9C7-3752F0662735}" type="datetimeFigureOut">
               <a:rPr lang="en-US" smtClean="0"/>
               <a:t>10/26/2026</a:t>
             </a:fld>
@@ -3009,7 +3009,7 @@
           <a:bodyPr/>
           <a:lstStyle/>
           <a:p>
-            <a:fld id="{49CFD036-43A2-409F-AA03-9AEAD967771D}" type="slidenum">
+            <a:fld id="{828C42ED-CC03-4982-88EC-4076BCEB1E28}" type="slidenum">
               <a:rPr lang="en-US" smtClean="0"/>
               <a:t>‹#›</a:t>
             </a:fld>
@@ -3020,7 +3020,7 @@
     </p:spTree>
     <p:extLst>
       <p:ext uri="{BB962C8B-B14F-4D97-AF65-F5344CB8AC3E}">
-        <p14:creationId xmlns:p14="http://schemas.microsoft.com/office/powerpoint/2010/main" val="242727536"/>
+        <p14:creationId xmlns:p14="http://schemas.microsoft.com/office/powerpoint/2010/main" val="1089027023"/>
       </p:ext>
     </p:extLst>
   </p:cSld>
@@ -3214,7 +3214,7 @@
           <a:bodyPr/>
           <a:lstStyle/>
           <a:p>
-            <a:fld id="{73FD1AE6-FD9D-46B2-AD34-6D7FD1390061}" type="datetimeFigureOut">
+            <a:fld id="{05A334F3-B55F-42B0-A9C7-3752F0662735}" type="datetimeFigureOut">
               <a:rPr lang="en-US" smtClean="0"/>
               <a:t>10/26/2026</a:t>
             </a:fld>
@@ -3256,7 +3256,7 @@
           <a:bodyPr/>
           <a:lstStyle/>
           <a:p>
-            <a:fld id="{49CFD036-43A2-409F-AA03-9AEAD967771D}" type="slidenum">
+            <a:fld id="{828C42ED-CC03-4982-88EC-4076BCEB1E28}" type="slidenum">
               <a:rPr lang="en-US" smtClean="0"/>
               <a:t>‹#›</a:t>
             </a:fld>
@@ -3267,7 +3267,7 @@
     </p:spTree>
     <p:extLst>
       <p:ext uri="{BB962C8B-B14F-4D97-AF65-F5344CB8AC3E}">
-        <p14:creationId xmlns:p14="http://schemas.microsoft.com/office/powerpoint/2010/main" val="3097841019"/>
+        <p14:creationId xmlns:p14="http://schemas.microsoft.com/office/powerpoint/2010/main" val="1372948052"/>
       </p:ext>
     </p:extLst>
   </p:cSld>
@@ -3446,7 +3446,7 @@
           <a:bodyPr/>
           <a:lstStyle/>
           <a:p>
-            <a:fld id="{73FD1AE6-FD9D-46B2-AD34-6D7FD1390061}" type="datetimeFigureOut">
+            <a:fld id="{05A334F3-B55F-42B0-A9C7-3752F0662735}" type="datetimeFigureOut">
               <a:rPr lang="en-US" smtClean="0"/>
               <a:t>10/26/2026</a:t>
             </a:fld>
@@ -3488,7 +3488,7 @@
           <a:bodyPr/>
           <a:lstStyle/>
           <a:p>
-            <a:fld id="{49CFD036-43A2-409F-AA03-9AEAD967771D}" type="slidenum">
+            <a:fld id="{828C42ED-CC03-4982-88EC-4076BCEB1E28}" type="slidenum">
               <a:rPr lang="en-US" smtClean="0"/>
               <a:t>‹#›</a:t>
             </a:fld>
@@ -3499,7 +3499,7 @@
     </p:spTree>
     <p:extLst>
       <p:ext uri="{BB962C8B-B14F-4D97-AF65-F5344CB8AC3E}">
-        <p14:creationId xmlns:p14="http://schemas.microsoft.com/office/powerpoint/2010/main" val="3630845101"/>
+        <p14:creationId xmlns:p14="http://schemas.microsoft.com/office/powerpoint/2010/main" val="2394930537"/>
       </p:ext>
     </p:extLst>
   </p:cSld>
@@ -3820,7 +3820,7 @@
           <a:bodyPr/>
           <a:lstStyle/>
           <a:p>
-            <a:fld id="{73FD1AE6-FD9D-46B2-AD34-6D7FD1390061}" type="datetimeFigureOut">
+            <a:fld id="{05A334F3-B55F-42B0-A9C7-3752F0662735}" type="datetimeFigureOut">
               <a:rPr lang="en-US" smtClean="0"/>
               <a:t>10/26/2026</a:t>
             </a:fld>
@@ -3862,7 +3862,7 @@
           <a:bodyPr/>
           <a:lstStyle/>
           <a:p>
-            <a:fld id="{49CFD036-43A2-409F-AA03-9AEAD967771D}" type="slidenum">
+            <a:fld id="{828C42ED-CC03-4982-88EC-4076BCEB1E28}" type="slidenum">
               <a:rPr lang="en-US" smtClean="0"/>
               <a:t>‹#›</a:t>
             </a:fld>
@@ -3873,7 +3873,7 @@
     </p:spTree>
     <p:extLst>
       <p:ext uri="{BB962C8B-B14F-4D97-AF65-F5344CB8AC3E}">
-        <p14:creationId xmlns:p14="http://schemas.microsoft.com/office/powerpoint/2010/main" val="204404323"/>
+        <p14:creationId xmlns:p14="http://schemas.microsoft.com/office/powerpoint/2010/main" val="2465042604"/>
       </p:ext>
     </p:extLst>
   </p:cSld>
@@ -3943,7 +3943,7 @@
           <a:bodyPr/>
           <a:lstStyle/>
           <a:p>
-            <a:fld id="{73FD1AE6-FD9D-46B2-AD34-6D7FD1390061}" type="datetimeFigureOut">
+            <a:fld id="{05A334F3-B55F-42B0-A9C7-3752F0662735}" type="datetimeFigureOut">
               <a:rPr lang="en-US" smtClean="0"/>
               <a:t>10/26/2026</a:t>
             </a:fld>
@@ -3985,7 +3985,7 @@
           <a:bodyPr/>
           <a:lstStyle/>
           <a:p>
-            <a:fld id="{49CFD036-43A2-409F-AA03-9AEAD967771D}" type="slidenum">
+            <a:fld id="{828C42ED-CC03-4982-88EC-4076BCEB1E28}" type="slidenum">
               <a:rPr lang="en-US" smtClean="0"/>
               <a:t>‹#›</a:t>
             </a:fld>
@@ -3996,7 +3996,7 @@
     </p:spTree>
     <p:extLst>
       <p:ext uri="{BB962C8B-B14F-4D97-AF65-F5344CB8AC3E}">
-        <p14:creationId xmlns:p14="http://schemas.microsoft.com/office/powerpoint/2010/main" val="2750355350"/>
+        <p14:creationId xmlns:p14="http://schemas.microsoft.com/office/powerpoint/2010/main" val="254656753"/>
       </p:ext>
     </p:extLst>
   </p:cSld>
@@ -4038,7 +4038,7 @@
           <a:bodyPr/>
           <a:lstStyle/>
           <a:p>
-            <a:fld id="{73FD1AE6-FD9D-46B2-AD34-6D7FD1390061}" type="datetimeFigureOut">
+            <a:fld id="{05A334F3-B55F-42B0-A9C7-3752F0662735}" type="datetimeFigureOut">
               <a:rPr lang="en-US" smtClean="0"/>
               <a:t>10/26/2026</a:t>
             </a:fld>
@@ -4080,7 +4080,7 @@
           <a:bodyPr/>
           <a:lstStyle/>
           <a:p>
-            <a:fld id="{49CFD036-43A2-409F-AA03-9AEAD967771D}" type="slidenum">
+            <a:fld id="{828C42ED-CC03-4982-88EC-4076BCEB1E28}" type="slidenum">
               <a:rPr lang="en-US" smtClean="0"/>
               <a:t>‹#›</a:t>
             </a:fld>
@@ -4091,7 +4091,7 @@
     </p:spTree>
     <p:extLst>
       <p:ext uri="{BB962C8B-B14F-4D97-AF65-F5344CB8AC3E}">
-        <p14:creationId xmlns:p14="http://schemas.microsoft.com/office/powerpoint/2010/main" val="2103621360"/>
+        <p14:creationId xmlns:p14="http://schemas.microsoft.com/office/powerpoint/2010/main" val="491353155"/>
       </p:ext>
     </p:extLst>
   </p:cSld>
@@ -4293,7 +4293,7 @@
           <a:bodyPr/>
           <a:lstStyle/>
           <a:p>
-            <a:fld id="{73FD1AE6-FD9D-46B2-AD34-6D7FD1390061}" type="datetimeFigureOut">
+            <a:fld id="{05A334F3-B55F-42B0-A9C7-3752F0662735}" type="datetimeFigureOut">
               <a:rPr lang="en-US" smtClean="0"/>
               <a:t>10/26/2026</a:t>
             </a:fld>
@@ -4335,7 +4335,7 @@
           <a:bodyPr/>
           <a:lstStyle/>
           <a:p>
-            <a:fld id="{49CFD036-43A2-409F-AA03-9AEAD967771D}" type="slidenum">
+            <a:fld id="{828C42ED-CC03-4982-88EC-4076BCEB1E28}" type="slidenum">
               <a:rPr lang="en-US" smtClean="0"/>
               <a:t>‹#›</a:t>
             </a:fld>
@@ -4346,7 +4346,7 @@
     </p:spTree>
     <p:extLst>
       <p:ext uri="{BB962C8B-B14F-4D97-AF65-F5344CB8AC3E}">
-        <p14:creationId xmlns:p14="http://schemas.microsoft.com/office/powerpoint/2010/main" val="2928872099"/>
+        <p14:creationId xmlns:p14="http://schemas.microsoft.com/office/powerpoint/2010/main" val="3852415950"/>
       </p:ext>
     </p:extLst>
   </p:cSld>
@@ -4556,7 +4556,7 @@
           <a:bodyPr/>
           <a:lstStyle/>
           <a:p>
-            <a:fld id="{73FD1AE6-FD9D-46B2-AD34-6D7FD1390061}" type="datetimeFigureOut">
+            <a:fld id="{05A334F3-B55F-42B0-A9C7-3752F0662735}" type="datetimeFigureOut">
               <a:rPr lang="en-US" smtClean="0"/>
               <a:t>10/26/2026</a:t>
             </a:fld>
@@ -4598,7 +4598,7 @@
           <a:bodyPr/>
           <a:lstStyle/>
           <a:p>
-            <a:fld id="{49CFD036-43A2-409F-AA03-9AEAD967771D}" type="slidenum">
+            <a:fld id="{828C42ED-CC03-4982-88EC-4076BCEB1E28}" type="slidenum">
               <a:rPr lang="en-US" smtClean="0"/>
               <a:t>‹#›</a:t>
             </a:fld>
@@ -4609,7 +4609,7 @@
     </p:spTree>
     <p:extLst>
       <p:ext uri="{BB962C8B-B14F-4D97-AF65-F5344CB8AC3E}">
-        <p14:creationId xmlns:p14="http://schemas.microsoft.com/office/powerpoint/2010/main" val="385328624"/>
+        <p14:creationId xmlns:p14="http://schemas.microsoft.com/office/powerpoint/2010/main" val="1448572268"/>
       </p:ext>
     </p:extLst>
   </p:cSld>
@@ -5299,7 +5299,7 @@
             </a:lvl1pPr>
           </a:lstStyle>
           <a:p>
-            <a:fld id="{73FD1AE6-FD9D-46B2-AD34-6D7FD1390061}" type="datetimeFigureOut">
+            <a:fld id="{05A334F3-B55F-42B0-A9C7-3752F0662735}" type="datetimeFigureOut">
               <a:rPr lang="en-US" smtClean="0"/>
               <a:t>10/26/2026</a:t>
             </a:fld>
@@ -5375,7 +5375,7 @@
             </a:lvl1pPr>
           </a:lstStyle>
           <a:p>
-            <a:fld id="{49CFD036-43A2-409F-AA03-9AEAD967771D}" type="slidenum">
+            <a:fld id="{828C42ED-CC03-4982-88EC-4076BCEB1E28}" type="slidenum">
               <a:rPr lang="en-US" smtClean="0"/>
               <a:t>‹#›</a:t>
             </a:fld>
@@ -5386,7 +5386,7 @@
     </p:spTree>
     <p:extLst>
       <p:ext uri="{BB962C8B-B14F-4D97-AF65-F5344CB8AC3E}">
-        <p14:creationId xmlns:p14="http://schemas.microsoft.com/office/powerpoint/2010/main" val="3963511532"/>
+        <p14:creationId xmlns:p14="http://schemas.microsoft.com/office/powerpoint/2010/main" val="3097974788"/>
       </p:ext>
     </p:extLst>
   </p:cSld>
@@ -5830,7 +5830,7 @@
           <p:cNvPr id="2" name="Title 1">
             <a:extLst>
               <a:ext uri="{FF2B5EF4-FFF2-40B4-BE49-F238E27FC236}">
-                <a16:creationId xmlns:a16="http://schemas.microsoft.com/office/drawing/2014/main" id="{06868E23-607A-5874-3700-DEAEE8C4A33D}"/>
+                <a16:creationId xmlns:a16="http://schemas.microsoft.com/office/drawing/2014/main" id="{CB79F860-8BB6-B4A0-8817-A6EF99BCFA2C}"/>
               </a:ext>
             </a:extLst>
           </p:cNvPr>
@@ -5858,7 +5858,7 @@
           <p:cNvPr id="3" name="Subtitle 2">
             <a:extLst>
               <a:ext uri="{FF2B5EF4-FFF2-40B4-BE49-F238E27FC236}">
-                <a16:creationId xmlns:a16="http://schemas.microsoft.com/office/drawing/2014/main" id="{70A300F1-987A-CEE1-138F-21D09A48FB33}"/>
+                <a16:creationId xmlns:a16="http://schemas.microsoft.com/office/drawing/2014/main" id="{B09B05B6-62F8-7AA6-97F6-A29B85C0049D}"/>
               </a:ext>
             </a:extLst>
           </p:cNvPr>
@@ -5884,7 +5884,7 @@
     </p:spTree>
     <p:extLst>
       <p:ext uri="{BB962C8B-B14F-4D97-AF65-F5344CB8AC3E}">
-        <p14:creationId xmlns:p14="http://schemas.microsoft.com/office/powerpoint/2010/main" val="1122504249"/>
+        <p14:creationId xmlns:p14="http://schemas.microsoft.com/office/powerpoint/2010/main" val="3924803944"/>
       </p:ext>
     </p:extLst>
   </p:cSld>
@@ -5916,7 +5916,7 @@
           <p:cNvPr id="2" name="Title 1">
             <a:extLst>
               <a:ext uri="{FF2B5EF4-FFF2-40B4-BE49-F238E27FC236}">
-                <a16:creationId xmlns:a16="http://schemas.microsoft.com/office/drawing/2014/main" id="{0609D65B-DB71-0F95-6D3C-9038C00878E5}"/>
+                <a16:creationId xmlns:a16="http://schemas.microsoft.com/office/drawing/2014/main" id="{F54A62C5-BFB4-2479-A681-38C445B4673B}"/>
               </a:ext>
             </a:extLst>
           </p:cNvPr>
@@ -5944,7 +5944,7 @@
           <p:cNvPr id="3" name="Content Placeholder 2">
             <a:extLst>
               <a:ext uri="{FF2B5EF4-FFF2-40B4-BE49-F238E27FC236}">
-                <a16:creationId xmlns:a16="http://schemas.microsoft.com/office/drawing/2014/main" id="{10F09085-C248-4B00-894C-A99175924D0A}"/>
+                <a16:creationId xmlns:a16="http://schemas.microsoft.com/office/drawing/2014/main" id="{34099DFD-B390-AC80-612A-DEAD30BE5394}"/>
               </a:ext>
             </a:extLst>
           </p:cNvPr>
@@ -5983,7 +5983,7 @@
     </p:spTree>
     <p:extLst>
       <p:ext uri="{BB962C8B-B14F-4D97-AF65-F5344CB8AC3E}">
-        <p14:creationId xmlns:p14="http://schemas.microsoft.com/office/powerpoint/2010/main" val="1754044063"/>
+        <p14:creationId xmlns:p14="http://schemas.microsoft.com/office/powerpoint/2010/main" val="3854464846"/>
       </p:ext>
     </p:extLst>
   </p:cSld>
